--- a/docs/20251023-汇报/20251023-汇报.pptx
+++ b/docs/20251023-汇报/20251023-汇报.pptx
@@ -6,6 +6,11 @@
   </p:sldMasterIdLst>
   <p:sldIdLst>
     <p:sldId id="256" r:id="rId2"/>
+    <p:sldId id="257" r:id="rId3"/>
+    <p:sldId id="258" r:id="rId4"/>
+    <p:sldId id="260" r:id="rId5"/>
+    <p:sldId id="261" r:id="rId6"/>
+    <p:sldId id="259" r:id="rId7"/>
   </p:sldIdLst>
   <p:sldSz cx="12192000" cy="6858000"/>
   <p:notesSz cx="6858000" cy="9144000"/>
@@ -252,7 +257,7 @@
           <a:p>
             <a:fld id="{D997B5FA-0921-464F-AAE1-844C04324D75}" type="datetimeFigureOut">
               <a:rPr lang="zh-CN" altLang="en-US" smtClean="0"/>
-              <a:t>2025/10/20</a:t>
+              <a:t>2025/10/21</a:t>
             </a:fld>
             <a:endParaRPr lang="zh-CN" altLang="en-US"/>
           </a:p>
@@ -415,7 +420,7 @@
           <a:p>
             <a:fld id="{D997B5FA-0921-464F-AAE1-844C04324D75}" type="datetimeFigureOut">
               <a:rPr lang="zh-CN" altLang="en-US" smtClean="0"/>
-              <a:t>2025/10/20</a:t>
+              <a:t>2025/10/21</a:t>
             </a:fld>
             <a:endParaRPr lang="zh-CN" altLang="en-US"/>
           </a:p>
@@ -588,7 +593,7 @@
           <a:p>
             <a:fld id="{D997B5FA-0921-464F-AAE1-844C04324D75}" type="datetimeFigureOut">
               <a:rPr lang="zh-CN" altLang="en-US" smtClean="0"/>
-              <a:t>2025/10/20</a:t>
+              <a:t>2025/10/21</a:t>
             </a:fld>
             <a:endParaRPr lang="zh-CN" altLang="en-US"/>
           </a:p>
@@ -751,7 +756,7 @@
           <a:p>
             <a:fld id="{D997B5FA-0921-464F-AAE1-844C04324D75}" type="datetimeFigureOut">
               <a:rPr lang="zh-CN" altLang="en-US" smtClean="0"/>
-              <a:t>2025/10/20</a:t>
+              <a:t>2025/10/21</a:t>
             </a:fld>
             <a:endParaRPr lang="zh-CN" altLang="en-US"/>
           </a:p>
@@ -991,7 +996,7 @@
           <a:p>
             <a:fld id="{D997B5FA-0921-464F-AAE1-844C04324D75}" type="datetimeFigureOut">
               <a:rPr lang="zh-CN" altLang="en-US" smtClean="0"/>
-              <a:t>2025/10/20</a:t>
+              <a:t>2025/10/21</a:t>
             </a:fld>
             <a:endParaRPr lang="zh-CN" altLang="en-US"/>
           </a:p>
@@ -1215,7 +1220,7 @@
           <a:p>
             <a:fld id="{D997B5FA-0921-464F-AAE1-844C04324D75}" type="datetimeFigureOut">
               <a:rPr lang="zh-CN" altLang="en-US" smtClean="0"/>
-              <a:t>2025/10/20</a:t>
+              <a:t>2025/10/21</a:t>
             </a:fld>
             <a:endParaRPr lang="zh-CN" altLang="en-US"/>
           </a:p>
@@ -1574,7 +1579,7 @@
           <a:p>
             <a:fld id="{D997B5FA-0921-464F-AAE1-844C04324D75}" type="datetimeFigureOut">
               <a:rPr lang="zh-CN" altLang="en-US" smtClean="0"/>
-              <a:t>2025/10/20</a:t>
+              <a:t>2025/10/21</a:t>
             </a:fld>
             <a:endParaRPr lang="zh-CN" altLang="en-US"/>
           </a:p>
@@ -1686,7 +1691,7 @@
           <a:p>
             <a:fld id="{D997B5FA-0921-464F-AAE1-844C04324D75}" type="datetimeFigureOut">
               <a:rPr lang="zh-CN" altLang="en-US" smtClean="0"/>
-              <a:t>2025/10/20</a:t>
+              <a:t>2025/10/21</a:t>
             </a:fld>
             <a:endParaRPr lang="zh-CN" altLang="en-US"/>
           </a:p>
@@ -1776,7 +1781,7 @@
           <a:p>
             <a:fld id="{D997B5FA-0921-464F-AAE1-844C04324D75}" type="datetimeFigureOut">
               <a:rPr lang="zh-CN" altLang="en-US" smtClean="0"/>
-              <a:t>2025/10/20</a:t>
+              <a:t>2025/10/21</a:t>
             </a:fld>
             <a:endParaRPr lang="zh-CN" altLang="en-US"/>
           </a:p>
@@ -2046,7 +2051,7 @@
           <a:p>
             <a:fld id="{D997B5FA-0921-464F-AAE1-844C04324D75}" type="datetimeFigureOut">
               <a:rPr lang="zh-CN" altLang="en-US" smtClean="0"/>
-              <a:t>2025/10/20</a:t>
+              <a:t>2025/10/21</a:t>
             </a:fld>
             <a:endParaRPr lang="zh-CN" altLang="en-US"/>
           </a:p>
@@ -2293,7 +2298,7 @@
           <a:p>
             <a:fld id="{D997B5FA-0921-464F-AAE1-844C04324D75}" type="datetimeFigureOut">
               <a:rPr lang="zh-CN" altLang="en-US" smtClean="0"/>
-              <a:t>2025/10/20</a:t>
+              <a:t>2025/10/21</a:t>
             </a:fld>
             <a:endParaRPr lang="zh-CN" altLang="en-US"/>
           </a:p>
@@ -2499,7 +2504,7 @@
           <a:p>
             <a:fld id="{D997B5FA-0921-464F-AAE1-844C04324D75}" type="datetimeFigureOut">
               <a:rPr lang="zh-CN" altLang="en-US" smtClean="0"/>
-              <a:t>2025/10/20</a:t>
+              <a:t>2025/10/21</a:t>
             </a:fld>
             <a:endParaRPr lang="zh-CN" altLang="en-US"/>
           </a:p>
@@ -2933,7 +2938,7 @@
               <a:t>·</a:t>
             </a:r>
             <a:r>
-              <a:rPr lang="zh-CN" altLang="en-US"/>
+              <a:rPr lang="zh-CN" altLang="en-US" dirty="0"/>
               <a:t>学习搭子</a:t>
             </a:r>
           </a:p>
@@ -2957,10 +2962,19 @@
         </p:nvSpPr>
         <p:spPr/>
         <p:txBody>
-          <a:bodyPr/>
-          <a:lstStyle/>
-          <a:p>
-            <a:endParaRPr lang="zh-CN" altLang="en-US"/>
+          <a:bodyPr>
+            <a:normAutofit/>
+          </a:bodyPr>
+          <a:lstStyle/>
+          <a:p>
+            <a:r>
+              <a:rPr lang="en-US" altLang="zh-CN" sz="3200" dirty="0"/>
+              <a:t>V2.0 </a:t>
+            </a:r>
+            <a:r>
+              <a:rPr lang="zh-CN" altLang="en-US" sz="3200" dirty="0"/>
+              <a:t>企划与探索</a:t>
+            </a:r>
           </a:p>
         </p:txBody>
       </p:sp>
@@ -2968,6 +2982,896 @@
     <p:extLst>
       <p:ext uri="{BB962C8B-B14F-4D97-AF65-F5344CB8AC3E}">
         <p14:creationId xmlns:p14="http://schemas.microsoft.com/office/powerpoint/2010/main" val="1126499123"/>
+      </p:ext>
+    </p:extLst>
+  </p:cSld>
+  <p:clrMapOvr>
+    <a:masterClrMapping/>
+  </p:clrMapOvr>
+</p:sld>
+</file>
+
+<file path=ppt/slides/slide2.xml><?xml version="1.0" encoding="utf-8"?>
+<p:sld xmlns:a="http://schemas.openxmlformats.org/drawingml/2006/main" xmlns:r="http://schemas.openxmlformats.org/officeDocument/2006/relationships" xmlns:p="http://schemas.openxmlformats.org/presentationml/2006/main">
+  <p:cSld>
+    <p:spTree>
+      <p:nvGrpSpPr>
+        <p:cNvPr id="1" name=""/>
+        <p:cNvGrpSpPr/>
+        <p:nvPr/>
+      </p:nvGrpSpPr>
+      <p:grpSpPr>
+        <a:xfrm>
+          <a:off x="0" y="0"/>
+          <a:ext cx="0" cy="0"/>
+          <a:chOff x="0" y="0"/>
+          <a:chExt cx="0" cy="0"/>
+        </a:xfrm>
+      </p:grpSpPr>
+      <p:sp>
+        <p:nvSpPr>
+          <p:cNvPr id="2" name="标题 1">
+            <a:extLst>
+              <a:ext uri="{FF2B5EF4-FFF2-40B4-BE49-F238E27FC236}">
+                <a16:creationId xmlns:a16="http://schemas.microsoft.com/office/drawing/2014/main" id="{15B50615-9A02-020E-DDD3-570AF15A7DD4}"/>
+              </a:ext>
+            </a:extLst>
+          </p:cNvPr>
+          <p:cNvSpPr>
+            <a:spLocks noGrp="1"/>
+          </p:cNvSpPr>
+          <p:nvPr>
+            <p:ph type="title"/>
+          </p:nvPr>
+        </p:nvSpPr>
+        <p:spPr/>
+        <p:txBody>
+          <a:bodyPr/>
+          <a:lstStyle/>
+          <a:p>
+            <a:r>
+              <a:rPr lang="zh-CN" altLang="en-US" dirty="0"/>
+              <a:t>项目研发架构</a:t>
+            </a:r>
+            <a:r>
+              <a:rPr lang="en-US" altLang="zh-CN" dirty="0"/>
+              <a:t>&amp;</a:t>
+            </a:r>
+            <a:r>
+              <a:rPr lang="zh-CN" altLang="en-US" dirty="0"/>
+              <a:t>层次</a:t>
+            </a:r>
+          </a:p>
+        </p:txBody>
+      </p:sp>
+      <p:sp>
+        <p:nvSpPr>
+          <p:cNvPr id="3" name="内容占位符 2">
+            <a:extLst>
+              <a:ext uri="{FF2B5EF4-FFF2-40B4-BE49-F238E27FC236}">
+                <a16:creationId xmlns:a16="http://schemas.microsoft.com/office/drawing/2014/main" id="{93F3262B-0508-FF3E-4BD6-D7A8B7F49808}"/>
+              </a:ext>
+            </a:extLst>
+          </p:cNvPr>
+          <p:cNvSpPr>
+            <a:spLocks noGrp="1"/>
+          </p:cNvSpPr>
+          <p:nvPr>
+            <p:ph idx="1"/>
+          </p:nvPr>
+        </p:nvSpPr>
+        <p:spPr/>
+        <p:txBody>
+          <a:bodyPr/>
+          <a:lstStyle/>
+          <a:p>
+            <a:r>
+              <a:rPr lang="zh-CN" altLang="en-US" dirty="0"/>
+              <a:t>数字人智能课堂（</a:t>
+            </a:r>
+            <a:r>
+              <a:rPr lang="en-US" altLang="zh-CN" dirty="0"/>
+              <a:t>V4.0</a:t>
+            </a:r>
+            <a:r>
+              <a:rPr lang="zh-CN" altLang="en-US" dirty="0"/>
+              <a:t>）</a:t>
+            </a:r>
+            <a:endParaRPr lang="en-US" altLang="zh-CN" dirty="0"/>
+          </a:p>
+          <a:p>
+            <a:pPr lvl="1"/>
+            <a:r>
+              <a:rPr lang="zh-CN" altLang="en-US" dirty="0"/>
+              <a:t>课堂</a:t>
+            </a:r>
+            <a:r>
+              <a:rPr lang="en-US" altLang="zh-CN" dirty="0"/>
+              <a:t>PPT</a:t>
+            </a:r>
+            <a:r>
+              <a:rPr lang="zh-CN" altLang="en-US" dirty="0"/>
+              <a:t>、</a:t>
+            </a:r>
+            <a:r>
+              <a:rPr lang="en-US" altLang="zh-CN" dirty="0"/>
+              <a:t>Word</a:t>
+            </a:r>
+            <a:r>
+              <a:rPr lang="zh-CN" altLang="en-US" dirty="0"/>
+              <a:t>文档生成系统（</a:t>
+            </a:r>
+            <a:r>
+              <a:rPr lang="en-US" altLang="zh-CN" dirty="0"/>
+              <a:t>V3.0+</a:t>
+            </a:r>
+            <a:r>
+              <a:rPr lang="zh-CN" altLang="en-US" dirty="0"/>
+              <a:t>）</a:t>
+            </a:r>
+            <a:endParaRPr lang="en-US" altLang="zh-CN" dirty="0"/>
+          </a:p>
+          <a:p>
+            <a:pPr lvl="1"/>
+            <a:r>
+              <a:rPr lang="zh-CN" altLang="en-US" dirty="0"/>
+              <a:t>数字人伴学系统（</a:t>
+            </a:r>
+            <a:r>
+              <a:rPr lang="en-US" altLang="zh-CN" dirty="0"/>
+              <a:t>V3.0</a:t>
+            </a:r>
+            <a:r>
+              <a:rPr lang="zh-CN" altLang="en-US" dirty="0"/>
+              <a:t>）</a:t>
+            </a:r>
+            <a:endParaRPr lang="en-US" altLang="zh-CN" dirty="0"/>
+          </a:p>
+          <a:p>
+            <a:pPr lvl="2"/>
+            <a:r>
+              <a:rPr lang="zh-CN" altLang="en-US" dirty="0"/>
+              <a:t>语音</a:t>
+            </a:r>
+            <a:r>
+              <a:rPr lang="en-US" altLang="zh-CN" dirty="0"/>
+              <a:t>-</a:t>
+            </a:r>
+            <a:r>
+              <a:rPr lang="zh-CN" altLang="en-US" dirty="0"/>
+              <a:t>情感识别系统（</a:t>
+            </a:r>
+            <a:r>
+              <a:rPr lang="en-US" altLang="zh-CN" dirty="0"/>
+              <a:t>V2.0+</a:t>
+            </a:r>
+            <a:r>
+              <a:rPr lang="zh-CN" altLang="en-US" dirty="0"/>
+              <a:t>）</a:t>
+            </a:r>
+            <a:endParaRPr lang="en-US" altLang="zh-CN" dirty="0"/>
+          </a:p>
+          <a:p>
+            <a:pPr lvl="2"/>
+            <a:r>
+              <a:rPr lang="en-US" altLang="zh-CN" dirty="0"/>
+              <a:t> </a:t>
+            </a:r>
+            <a:r>
+              <a:rPr lang="zh-CN" altLang="en-US" dirty="0">
+                <a:highlight>
+                  <a:srgbClr val="FFFF00"/>
+                </a:highlight>
+              </a:rPr>
+              <a:t>多智能体</a:t>
+            </a:r>
+            <a:r>
+              <a:rPr lang="en-US" altLang="zh-CN" dirty="0">
+                <a:highlight>
+                  <a:srgbClr val="FFFF00"/>
+                </a:highlight>
+              </a:rPr>
+              <a:t>-</a:t>
+            </a:r>
+            <a:r>
+              <a:rPr lang="zh-CN" altLang="en-US" dirty="0">
+                <a:highlight>
+                  <a:srgbClr val="FFFF00"/>
+                </a:highlight>
+              </a:rPr>
+              <a:t>知识库协作系统（</a:t>
+            </a:r>
+            <a:r>
+              <a:rPr lang="en-US" altLang="zh-CN" dirty="0">
+                <a:highlight>
+                  <a:srgbClr val="FFFF00"/>
+                </a:highlight>
+              </a:rPr>
+              <a:t>V2.0</a:t>
+            </a:r>
+            <a:r>
+              <a:rPr lang="zh-CN" altLang="en-US" dirty="0">
+                <a:highlight>
+                  <a:srgbClr val="FFFF00"/>
+                </a:highlight>
+              </a:rPr>
+              <a:t>）</a:t>
+            </a:r>
+            <a:endParaRPr lang="en-US" altLang="zh-CN" dirty="0">
+              <a:highlight>
+                <a:srgbClr val="FFFF00"/>
+              </a:highlight>
+            </a:endParaRPr>
+          </a:p>
+          <a:p>
+            <a:pPr lvl="3"/>
+            <a:r>
+              <a:rPr lang="zh-CN" altLang="en-US" dirty="0">
+                <a:highlight>
+                  <a:srgbClr val="00FF00"/>
+                </a:highlight>
+              </a:rPr>
+              <a:t>用户答题平台（</a:t>
+            </a:r>
+            <a:r>
+              <a:rPr lang="en-US" altLang="zh-CN" dirty="0">
+                <a:highlight>
+                  <a:srgbClr val="00FF00"/>
+                </a:highlight>
+              </a:rPr>
+              <a:t>V1.0-</a:t>
+            </a:r>
+            <a:r>
+              <a:rPr lang="zh-CN" altLang="en-US" dirty="0">
+                <a:highlight>
+                  <a:srgbClr val="00FF00"/>
+                </a:highlight>
+              </a:rPr>
+              <a:t>课程基线）√ </a:t>
+            </a:r>
+            <a:r>
+              <a:rPr lang="en-US" altLang="zh-CN" dirty="0">
+                <a:highlight>
+                  <a:srgbClr val="00FF00"/>
+                </a:highlight>
+              </a:rPr>
+              <a:t>2025.10.11</a:t>
+            </a:r>
+            <a:r>
+              <a:rPr lang="zh-CN" altLang="en-US" dirty="0">
+                <a:highlight>
+                  <a:srgbClr val="00FF00"/>
+                </a:highlight>
+              </a:rPr>
+              <a:t>已验收</a:t>
+            </a:r>
+            <a:endParaRPr lang="en-US" altLang="zh-CN" dirty="0">
+              <a:highlight>
+                <a:srgbClr val="00FF00"/>
+              </a:highlight>
+            </a:endParaRPr>
+          </a:p>
+          <a:p>
+            <a:pPr lvl="3"/>
+            <a:r>
+              <a:rPr lang="zh-CN" altLang="en-US" dirty="0">
+                <a:highlight>
+                  <a:srgbClr val="C0C0C0"/>
+                </a:highlight>
+              </a:rPr>
+              <a:t>日语游戏化练习平台（</a:t>
+            </a:r>
+            <a:r>
+              <a:rPr lang="en-US" altLang="zh-CN" dirty="0">
+                <a:highlight>
+                  <a:srgbClr val="C0C0C0"/>
+                </a:highlight>
+              </a:rPr>
+              <a:t>V1.0-</a:t>
+            </a:r>
+            <a:r>
+              <a:rPr lang="zh-CN" altLang="en-US" dirty="0">
+                <a:highlight>
+                  <a:srgbClr val="C0C0C0"/>
+                </a:highlight>
+              </a:rPr>
+              <a:t>暑期东语外包）√ 已上线</a:t>
+            </a:r>
+            <a:endParaRPr lang="en-US" altLang="zh-CN" dirty="0">
+              <a:highlight>
+                <a:srgbClr val="C0C0C0"/>
+              </a:highlight>
+            </a:endParaRPr>
+          </a:p>
+          <a:p>
+            <a:pPr lvl="2"/>
+            <a:r>
+              <a:rPr lang="zh-CN" altLang="en-US" dirty="0"/>
+              <a:t>语音克隆</a:t>
+            </a:r>
+            <a:r>
+              <a:rPr lang="en-US" altLang="zh-CN" dirty="0"/>
+              <a:t>-</a:t>
+            </a:r>
+            <a:r>
+              <a:rPr lang="zh-CN" altLang="en-US" dirty="0"/>
+              <a:t>合成系统</a:t>
+            </a:r>
+            <a:r>
+              <a:rPr lang="en-US" altLang="zh-CN" dirty="0"/>
+              <a:t>(V2.0+)</a:t>
+            </a:r>
+          </a:p>
+          <a:p>
+            <a:pPr lvl="2"/>
+            <a:r>
+              <a:rPr lang="zh-CN" altLang="en-US" dirty="0"/>
+              <a:t>数字人合成</a:t>
+            </a:r>
+            <a:r>
+              <a:rPr lang="en-US" altLang="zh-CN" dirty="0"/>
+              <a:t>-</a:t>
+            </a:r>
+            <a:r>
+              <a:rPr lang="zh-CN" altLang="en-US" dirty="0"/>
+              <a:t>推流系统</a:t>
+            </a:r>
+            <a:r>
+              <a:rPr lang="en-US" altLang="zh-CN" dirty="0"/>
+              <a:t>(V2.0+)</a:t>
+            </a:r>
+          </a:p>
+          <a:p>
+            <a:pPr lvl="1"/>
+            <a:r>
+              <a:rPr lang="zh-CN" altLang="en-US" dirty="0"/>
+              <a:t>数字人教师讲演系统（</a:t>
+            </a:r>
+            <a:r>
+              <a:rPr lang="en-US" altLang="zh-CN" dirty="0"/>
+              <a:t>V3.0+</a:t>
+            </a:r>
+            <a:r>
+              <a:rPr lang="zh-CN" altLang="en-US" dirty="0"/>
+              <a:t>）</a:t>
+            </a:r>
+            <a:endParaRPr lang="en-US" altLang="zh-CN" dirty="0"/>
+          </a:p>
+          <a:p>
+            <a:pPr lvl="1"/>
+            <a:r>
+              <a:rPr lang="zh-CN" altLang="en-US" dirty="0"/>
+              <a:t>可解释性课程知识视频合成系统（</a:t>
+            </a:r>
+            <a:r>
+              <a:rPr lang="en-US" altLang="zh-CN" dirty="0"/>
+              <a:t>V3.0+</a:t>
+            </a:r>
+            <a:r>
+              <a:rPr lang="zh-CN" altLang="en-US" dirty="0"/>
+              <a:t>）</a:t>
+            </a:r>
+            <a:endParaRPr lang="en-US" altLang="zh-CN" dirty="0"/>
+          </a:p>
+          <a:p>
+            <a:endParaRPr lang="en-US" altLang="zh-CN" dirty="0"/>
+          </a:p>
+          <a:p>
+            <a:pPr marL="914400" lvl="2" indent="0">
+              <a:buNone/>
+            </a:pPr>
+            <a:endParaRPr lang="zh-CN" altLang="en-US" dirty="0"/>
+          </a:p>
+        </p:txBody>
+      </p:sp>
+      <p:pic>
+        <p:nvPicPr>
+          <p:cNvPr id="5" name="图片 4">
+            <a:extLst>
+              <a:ext uri="{FF2B5EF4-FFF2-40B4-BE49-F238E27FC236}">
+                <a16:creationId xmlns:a16="http://schemas.microsoft.com/office/drawing/2014/main" id="{C6881F70-DF2C-8CE6-FE8B-C2245E65A22C}"/>
+              </a:ext>
+            </a:extLst>
+          </p:cNvPr>
+          <p:cNvPicPr>
+            <a:picLocks noChangeAspect="1"/>
+          </p:cNvPicPr>
+          <p:nvPr/>
+        </p:nvPicPr>
+        <p:blipFill>
+          <a:blip r:embed="rId2" cstate="print">
+            <a:extLst>
+              <a:ext uri="{28A0092B-C50C-407E-A947-70E740481C1C}">
+                <a14:useLocalDpi xmlns:a14="http://schemas.microsoft.com/office/drawing/2010/main" val="0"/>
+              </a:ext>
+            </a:extLst>
+          </a:blip>
+          <a:stretch>
+            <a:fillRect/>
+          </a:stretch>
+        </p:blipFill>
+        <p:spPr>
+          <a:xfrm>
+            <a:off x="7942602" y="1027906"/>
+            <a:ext cx="3888000" cy="5260235"/>
+          </a:xfrm>
+          <a:prstGeom prst="rect">
+            <a:avLst/>
+          </a:prstGeom>
+        </p:spPr>
+      </p:pic>
+    </p:spTree>
+    <p:extLst>
+      <p:ext uri="{BB962C8B-B14F-4D97-AF65-F5344CB8AC3E}">
+        <p14:creationId xmlns:p14="http://schemas.microsoft.com/office/powerpoint/2010/main" val="2490793370"/>
+      </p:ext>
+    </p:extLst>
+  </p:cSld>
+  <p:clrMapOvr>
+    <a:masterClrMapping/>
+  </p:clrMapOvr>
+</p:sld>
+</file>
+
+<file path=ppt/slides/slide3.xml><?xml version="1.0" encoding="utf-8"?>
+<p:sld xmlns:a="http://schemas.openxmlformats.org/drawingml/2006/main" xmlns:r="http://schemas.openxmlformats.org/officeDocument/2006/relationships" xmlns:p="http://schemas.openxmlformats.org/presentationml/2006/main">
+  <p:cSld>
+    <p:spTree>
+      <p:nvGrpSpPr>
+        <p:cNvPr id="1" name=""/>
+        <p:cNvGrpSpPr/>
+        <p:nvPr/>
+      </p:nvGrpSpPr>
+      <p:grpSpPr>
+        <a:xfrm>
+          <a:off x="0" y="0"/>
+          <a:ext cx="0" cy="0"/>
+          <a:chOff x="0" y="0"/>
+          <a:chExt cx="0" cy="0"/>
+        </a:xfrm>
+      </p:grpSpPr>
+      <p:pic>
+        <p:nvPicPr>
+          <p:cNvPr id="5" name="图片 4" descr="图形用户界面, 应用程序&#10;&#10;AI 生成的内容可能不正确。">
+            <a:extLst>
+              <a:ext uri="{FF2B5EF4-FFF2-40B4-BE49-F238E27FC236}">
+                <a16:creationId xmlns:a16="http://schemas.microsoft.com/office/drawing/2014/main" id="{FA925ED1-2903-52E4-711B-1F07C5191BAD}"/>
+              </a:ext>
+            </a:extLst>
+          </p:cNvPr>
+          <p:cNvPicPr>
+            <a:picLocks noChangeAspect="1"/>
+          </p:cNvPicPr>
+          <p:nvPr/>
+        </p:nvPicPr>
+        <p:blipFill>
+          <a:blip r:embed="rId2" cstate="print">
+            <a:extLst>
+              <a:ext uri="{28A0092B-C50C-407E-A947-70E740481C1C}">
+                <a14:useLocalDpi xmlns:a14="http://schemas.microsoft.com/office/drawing/2010/main" val="0"/>
+              </a:ext>
+            </a:extLst>
+          </a:blip>
+          <a:stretch>
+            <a:fillRect/>
+          </a:stretch>
+        </p:blipFill>
+        <p:spPr>
+          <a:xfrm>
+            <a:off x="602902" y="572756"/>
+            <a:ext cx="6037227" cy="5184000"/>
+          </a:xfrm>
+          <a:prstGeom prst="rect">
+            <a:avLst/>
+          </a:prstGeom>
+        </p:spPr>
+      </p:pic>
+      <p:sp>
+        <p:nvSpPr>
+          <p:cNvPr id="6" name="文本框 5">
+            <a:extLst>
+              <a:ext uri="{FF2B5EF4-FFF2-40B4-BE49-F238E27FC236}">
+                <a16:creationId xmlns:a16="http://schemas.microsoft.com/office/drawing/2014/main" id="{13DEFB30-AEDB-4552-4D6A-0317C013E158}"/>
+              </a:ext>
+            </a:extLst>
+          </p:cNvPr>
+          <p:cNvSpPr txBox="1"/>
+          <p:nvPr/>
+        </p:nvSpPr>
+        <p:spPr>
+          <a:xfrm>
+            <a:off x="7092445" y="572756"/>
+            <a:ext cx="3999244" cy="461665"/>
+          </a:xfrm>
+          <a:prstGeom prst="rect">
+            <a:avLst/>
+          </a:prstGeom>
+          <a:noFill/>
+        </p:spPr>
+        <p:txBody>
+          <a:bodyPr wrap="square" rtlCol="0">
+            <a:spAutoFit/>
+          </a:bodyPr>
+          <a:lstStyle/>
+          <a:p>
+            <a:r>
+              <a:rPr lang="en-US" altLang="zh-CN" sz="2400" dirty="0"/>
+              <a:t>1.</a:t>
+            </a:r>
+            <a:r>
+              <a:rPr lang="zh-CN" altLang="en-US" sz="2400" dirty="0"/>
+              <a:t>配置智能体元信息</a:t>
+            </a:r>
+          </a:p>
+        </p:txBody>
+      </p:sp>
+      <p:pic>
+        <p:nvPicPr>
+          <p:cNvPr id="8" name="图片 7">
+            <a:extLst>
+              <a:ext uri="{FF2B5EF4-FFF2-40B4-BE49-F238E27FC236}">
+                <a16:creationId xmlns:a16="http://schemas.microsoft.com/office/drawing/2014/main" id="{E8FCB559-4037-A218-70D2-6C2073551674}"/>
+              </a:ext>
+            </a:extLst>
+          </p:cNvPr>
+          <p:cNvPicPr>
+            <a:picLocks noChangeAspect="1"/>
+          </p:cNvPicPr>
+          <p:nvPr/>
+        </p:nvPicPr>
+        <p:blipFill>
+          <a:blip r:embed="rId3"/>
+          <a:stretch>
+            <a:fillRect/>
+          </a:stretch>
+        </p:blipFill>
+        <p:spPr>
+          <a:xfrm>
+            <a:off x="7092445" y="1363170"/>
+            <a:ext cx="4154452" cy="4393586"/>
+          </a:xfrm>
+          <a:prstGeom prst="rect">
+            <a:avLst/>
+          </a:prstGeom>
+        </p:spPr>
+      </p:pic>
+    </p:spTree>
+    <p:extLst>
+      <p:ext uri="{BB962C8B-B14F-4D97-AF65-F5344CB8AC3E}">
+        <p14:creationId xmlns:p14="http://schemas.microsoft.com/office/powerpoint/2010/main" val="624592737"/>
+      </p:ext>
+    </p:extLst>
+  </p:cSld>
+  <p:clrMapOvr>
+    <a:masterClrMapping/>
+  </p:clrMapOvr>
+</p:sld>
+</file>
+
+<file path=ppt/slides/slide4.xml><?xml version="1.0" encoding="utf-8"?>
+<p:sld xmlns:a="http://schemas.openxmlformats.org/drawingml/2006/main" xmlns:r="http://schemas.openxmlformats.org/officeDocument/2006/relationships" xmlns:p="http://schemas.openxmlformats.org/presentationml/2006/main">
+  <p:cSld>
+    <p:spTree>
+      <p:nvGrpSpPr>
+        <p:cNvPr id="1" name=""/>
+        <p:cNvGrpSpPr/>
+        <p:nvPr/>
+      </p:nvGrpSpPr>
+      <p:grpSpPr>
+        <a:xfrm>
+          <a:off x="0" y="0"/>
+          <a:ext cx="0" cy="0"/>
+          <a:chOff x="0" y="0"/>
+          <a:chExt cx="0" cy="0"/>
+        </a:xfrm>
+      </p:grpSpPr>
+      <p:pic>
+        <p:nvPicPr>
+          <p:cNvPr id="8" name="图片 7" descr="图表&#10;&#10;AI 生成的内容可能不正确。">
+            <a:extLst>
+              <a:ext uri="{FF2B5EF4-FFF2-40B4-BE49-F238E27FC236}">
+                <a16:creationId xmlns:a16="http://schemas.microsoft.com/office/drawing/2014/main" id="{2A5E2845-2007-7071-3724-BBD5263CE4CD}"/>
+              </a:ext>
+            </a:extLst>
+          </p:cNvPr>
+          <p:cNvPicPr>
+            <a:picLocks noChangeAspect="1"/>
+          </p:cNvPicPr>
+          <p:nvPr/>
+        </p:nvPicPr>
+        <p:blipFill>
+          <a:blip r:embed="rId2" cstate="print">
+            <a:extLst>
+              <a:ext uri="{28A0092B-C50C-407E-A947-70E740481C1C}">
+                <a14:useLocalDpi xmlns:a14="http://schemas.microsoft.com/office/drawing/2010/main" val="0"/>
+              </a:ext>
+            </a:extLst>
+          </a:blip>
+          <a:stretch>
+            <a:fillRect/>
+          </a:stretch>
+        </p:blipFill>
+        <p:spPr>
+          <a:xfrm>
+            <a:off x="393839" y="347652"/>
+            <a:ext cx="11404321" cy="3888000"/>
+          </a:xfrm>
+          <a:prstGeom prst="rect">
+            <a:avLst/>
+          </a:prstGeom>
+        </p:spPr>
+      </p:pic>
+      <p:sp>
+        <p:nvSpPr>
+          <p:cNvPr id="9" name="文本框 8">
+            <a:extLst>
+              <a:ext uri="{FF2B5EF4-FFF2-40B4-BE49-F238E27FC236}">
+                <a16:creationId xmlns:a16="http://schemas.microsoft.com/office/drawing/2014/main" id="{85B34185-25C2-487A-B0BE-10D02DF90BC7}"/>
+              </a:ext>
+            </a:extLst>
+          </p:cNvPr>
+          <p:cNvSpPr txBox="1"/>
+          <p:nvPr/>
+        </p:nvSpPr>
+        <p:spPr>
+          <a:xfrm>
+            <a:off x="718457" y="4235652"/>
+            <a:ext cx="9661490" cy="1938992"/>
+          </a:xfrm>
+          <a:prstGeom prst="rect">
+            <a:avLst/>
+          </a:prstGeom>
+          <a:noFill/>
+        </p:spPr>
+        <p:txBody>
+          <a:bodyPr wrap="square" rtlCol="0">
+            <a:spAutoFit/>
+          </a:bodyPr>
+          <a:lstStyle/>
+          <a:p>
+            <a:pPr marL="342900" indent="-342900">
+              <a:buFont typeface="Arial" panose="020B0604020202020204" pitchFamily="34" charset="0"/>
+              <a:buChar char="•"/>
+            </a:pPr>
+            <a:r>
+              <a:rPr lang="en-US" altLang="zh-CN" sz="2400" dirty="0"/>
+              <a:t>Agent </a:t>
+            </a:r>
+            <a:r>
+              <a:rPr lang="zh-CN" altLang="en-US" sz="2400" dirty="0"/>
+              <a:t>智能体：统筹全局</a:t>
+            </a:r>
+            <a:endParaRPr lang="en-US" altLang="zh-CN" sz="2400" dirty="0"/>
+          </a:p>
+          <a:p>
+            <a:pPr marL="800100" lvl="1" indent="-342900">
+              <a:buFont typeface="Arial" panose="020B0604020202020204" pitchFamily="34" charset="0"/>
+              <a:buChar char="•"/>
+            </a:pPr>
+            <a:r>
+              <a:rPr lang="en-US" altLang="zh-CN" sz="2400" dirty="0"/>
+              <a:t>LLM </a:t>
+            </a:r>
+            <a:r>
+              <a:rPr lang="zh-CN" altLang="en-US" sz="2400" dirty="0"/>
+              <a:t>大模型：承上启下、智能体的基础能力</a:t>
+            </a:r>
+            <a:r>
+              <a:rPr lang="en-US" altLang="zh-CN" sz="2400" dirty="0"/>
+              <a:t>-</a:t>
+            </a:r>
+            <a:r>
+              <a:rPr lang="zh-CN" altLang="en-US" sz="2400" dirty="0"/>
+              <a:t>连接</a:t>
+            </a:r>
+            <a:endParaRPr lang="en-US" altLang="zh-CN" sz="2400" dirty="0"/>
+          </a:p>
+          <a:p>
+            <a:pPr marL="1257300" lvl="2" indent="-342900">
+              <a:buFont typeface="Arial" panose="020B0604020202020204" pitchFamily="34" charset="0"/>
+              <a:buChar char="•"/>
+            </a:pPr>
+            <a:r>
+              <a:rPr lang="en-US" altLang="zh-CN" sz="2400" dirty="0"/>
+              <a:t>Memory </a:t>
+            </a:r>
+            <a:r>
+              <a:rPr lang="zh-CN" altLang="en-US" sz="2400" dirty="0"/>
+              <a:t>记忆：数据库</a:t>
+            </a:r>
+            <a:endParaRPr lang="en-US" altLang="zh-CN" sz="2400" dirty="0"/>
+          </a:p>
+          <a:p>
+            <a:pPr marL="1257300" lvl="2" indent="-342900">
+              <a:buFont typeface="Arial" panose="020B0604020202020204" pitchFamily="34" charset="0"/>
+              <a:buChar char="•"/>
+            </a:pPr>
+            <a:r>
+              <a:rPr lang="en-US" altLang="zh-CN" sz="2400" dirty="0"/>
+              <a:t>Tool </a:t>
+            </a:r>
+            <a:r>
+              <a:rPr lang="zh-CN" altLang="en-US" sz="2400" dirty="0"/>
+              <a:t>工具：增广</a:t>
+            </a:r>
+            <a:endParaRPr lang="en-US" altLang="zh-CN" sz="2400" dirty="0"/>
+          </a:p>
+          <a:p>
+            <a:pPr marL="1257300" lvl="2" indent="-342900">
+              <a:buFont typeface="Arial" panose="020B0604020202020204" pitchFamily="34" charset="0"/>
+              <a:buChar char="•"/>
+            </a:pPr>
+            <a:r>
+              <a:rPr lang="en-US" altLang="zh-CN" sz="2400" dirty="0"/>
+              <a:t>Knowledge </a:t>
+            </a:r>
+            <a:r>
+              <a:rPr lang="zh-CN" altLang="en-US" sz="2400" dirty="0"/>
+              <a:t>知识：本地</a:t>
+            </a:r>
+            <a:r>
+              <a:rPr lang="en-US" altLang="zh-CN" sz="2400" dirty="0"/>
+              <a:t>RAG-</a:t>
+            </a:r>
+            <a:r>
+              <a:rPr lang="zh-CN" altLang="en-US" sz="2400" dirty="0"/>
+              <a:t>知识增广（</a:t>
+            </a:r>
+            <a:r>
+              <a:rPr lang="en-US" altLang="zh-CN" sz="2400" dirty="0"/>
+              <a:t>FT</a:t>
+            </a:r>
+            <a:r>
+              <a:rPr lang="zh-CN" altLang="en-US" sz="2400" dirty="0"/>
+              <a:t>）数据库</a:t>
+            </a:r>
+            <a:r>
+              <a:rPr lang="en-US" altLang="zh-CN" sz="2400" dirty="0"/>
+              <a:t> </a:t>
+            </a:r>
+            <a:endParaRPr lang="zh-CN" altLang="en-US" sz="2400" dirty="0"/>
+          </a:p>
+        </p:txBody>
+      </p:sp>
+    </p:spTree>
+    <p:extLst>
+      <p:ext uri="{BB962C8B-B14F-4D97-AF65-F5344CB8AC3E}">
+        <p14:creationId xmlns:p14="http://schemas.microsoft.com/office/powerpoint/2010/main" val="2287655655"/>
+      </p:ext>
+    </p:extLst>
+  </p:cSld>
+  <p:clrMapOvr>
+    <a:masterClrMapping/>
+  </p:clrMapOvr>
+</p:sld>
+</file>
+
+<file path=ppt/slides/slide5.xml><?xml version="1.0" encoding="utf-8"?>
+<p:sld xmlns:a="http://schemas.openxmlformats.org/drawingml/2006/main" xmlns:r="http://schemas.openxmlformats.org/officeDocument/2006/relationships" xmlns:p="http://schemas.openxmlformats.org/presentationml/2006/main">
+  <p:cSld>
+    <p:spTree>
+      <p:nvGrpSpPr>
+        <p:cNvPr id="1" name=""/>
+        <p:cNvGrpSpPr/>
+        <p:nvPr/>
+      </p:nvGrpSpPr>
+      <p:grpSpPr>
+        <a:xfrm>
+          <a:off x="0" y="0"/>
+          <a:ext cx="0" cy="0"/>
+          <a:chOff x="0" y="0"/>
+          <a:chExt cx="0" cy="0"/>
+        </a:xfrm>
+      </p:grpSpPr>
+      <p:sp>
+        <p:nvSpPr>
+          <p:cNvPr id="5" name="文本框 4">
+            <a:extLst>
+              <a:ext uri="{FF2B5EF4-FFF2-40B4-BE49-F238E27FC236}">
+                <a16:creationId xmlns:a16="http://schemas.microsoft.com/office/drawing/2014/main" id="{5AEC74DD-BD99-65C8-FC5A-B41AC6E9785E}"/>
+              </a:ext>
+            </a:extLst>
+          </p:cNvPr>
+          <p:cNvSpPr txBox="1"/>
+          <p:nvPr/>
+        </p:nvSpPr>
+        <p:spPr>
+          <a:xfrm>
+            <a:off x="319035" y="310216"/>
+            <a:ext cx="6164664" cy="584775"/>
+          </a:xfrm>
+          <a:prstGeom prst="rect">
+            <a:avLst/>
+          </a:prstGeom>
+          <a:noFill/>
+        </p:spPr>
+        <p:txBody>
+          <a:bodyPr wrap="square">
+            <a:spAutoFit/>
+          </a:bodyPr>
+          <a:lstStyle/>
+          <a:p>
+            <a:pPr marL="457200" indent="-457200">
+              <a:buFont typeface="Arial" panose="020B0604020202020204" pitchFamily="34" charset="0"/>
+              <a:buChar char="•"/>
+            </a:pPr>
+            <a:r>
+              <a:rPr lang="zh-CN" altLang="en-US" sz="3200" dirty="0"/>
+              <a:t>以一次实际的运行过程为例</a:t>
+            </a:r>
+          </a:p>
+        </p:txBody>
+      </p:sp>
+    </p:spTree>
+    <p:extLst>
+      <p:ext uri="{BB962C8B-B14F-4D97-AF65-F5344CB8AC3E}">
+        <p14:creationId xmlns:p14="http://schemas.microsoft.com/office/powerpoint/2010/main" val="780686695"/>
+      </p:ext>
+    </p:extLst>
+  </p:cSld>
+  <p:clrMapOvr>
+    <a:masterClrMapping/>
+  </p:clrMapOvr>
+</p:sld>
+</file>
+
+<file path=ppt/slides/slide6.xml><?xml version="1.0" encoding="utf-8"?>
+<p:sld xmlns:a="http://schemas.openxmlformats.org/drawingml/2006/main" xmlns:r="http://schemas.openxmlformats.org/officeDocument/2006/relationships" xmlns:p="http://schemas.openxmlformats.org/presentationml/2006/main">
+  <p:cSld>
+    <p:spTree>
+      <p:nvGrpSpPr>
+        <p:cNvPr id="1" name=""/>
+        <p:cNvGrpSpPr/>
+        <p:nvPr/>
+      </p:nvGrpSpPr>
+      <p:grpSpPr>
+        <a:xfrm>
+          <a:off x="0" y="0"/>
+          <a:ext cx="0" cy="0"/>
+          <a:chOff x="0" y="0"/>
+          <a:chExt cx="0" cy="0"/>
+        </a:xfrm>
+      </p:grpSpPr>
+      <p:pic>
+        <p:nvPicPr>
+          <p:cNvPr id="5" name="图片 4" descr="图示&#10;&#10;AI 生成的内容可能不正确。">
+            <a:extLst>
+              <a:ext uri="{FF2B5EF4-FFF2-40B4-BE49-F238E27FC236}">
+                <a16:creationId xmlns:a16="http://schemas.microsoft.com/office/drawing/2014/main" id="{03AB0E27-C161-9AEA-7543-CF9EBCD5C959}"/>
+              </a:ext>
+            </a:extLst>
+          </p:cNvPr>
+          <p:cNvPicPr>
+            <a:picLocks noChangeAspect="1"/>
+          </p:cNvPicPr>
+          <p:nvPr/>
+        </p:nvPicPr>
+        <p:blipFill>
+          <a:blip r:embed="rId2">
+            <a:extLst>
+              <a:ext uri="{28A0092B-C50C-407E-A947-70E740481C1C}">
+                <a14:useLocalDpi xmlns:a14="http://schemas.microsoft.com/office/drawing/2010/main" val="0"/>
+              </a:ext>
+            </a:extLst>
+          </a:blip>
+          <a:stretch>
+            <a:fillRect/>
+          </a:stretch>
+        </p:blipFill>
+        <p:spPr>
+          <a:xfrm>
+            <a:off x="1514" y="0"/>
+            <a:ext cx="12190486" cy="6858000"/>
+          </a:xfrm>
+          <a:prstGeom prst="rect">
+            <a:avLst/>
+          </a:prstGeom>
+        </p:spPr>
+      </p:pic>
+    </p:spTree>
+    <p:extLst>
+      <p:ext uri="{BB962C8B-B14F-4D97-AF65-F5344CB8AC3E}">
+        <p14:creationId xmlns:p14="http://schemas.microsoft.com/office/powerpoint/2010/main" val="1540876016"/>
       </p:ext>
     </p:extLst>
   </p:cSld>
